--- a/output/BP框架/燕京中发融资BP框架（教学版）.pptx
+++ b/output/BP框架/燕京中发融资BP框架（教学版）.pptx
@@ -625,7 +625,7 @@
           <a:p>
             <a:r>
               <a:rPr lang="en-US" dirty="0"/>
-              <a:t>一页最多 8 个单品。在售的和在研的分开标，别混在一起。</a:t>
+              <a:t>三条产品线按收入占比从大到小排，不要按品类出现的先后排——投资人先看的是钱从哪来。一页最多 8 个单品，在售的和在研的分开标。</a:t>
             </a:r>
             <a:endParaRPr lang="en-US" dirty="0"/>
           </a:p>
@@ -4785,7 +4785,7 @@
                 <a:ea typeface="微软雅黑" pitchFamily="34" charset="-122"/>
                 <a:cs typeface="微软雅黑" pitchFamily="34" charset="-120"/>
               </a:rPr>
-              <a:t>一页最多 8 个单品。在售的和在研的分开标，别混在一起。</a:t>
+              <a:t>三条产品线按收入占比从大到小排，不要按品类出现的先后排——投资人先看的是钱从哪来。一页最多 8 个单品，在售的和在研的分开标。</a:t>
             </a:r>
             <a:endParaRPr lang="en-US" sz="1250" dirty="0"/>
           </a:p>
